--- a/decks/geog-africa/geog-africa_ch5_wider-world.pptx
+++ b/decks/geog-africa/geog-africa_ch5_wider-world.pptx
@@ -126,30 +126,30 @@
   <p:extLst>
     <p:ext uri="{521415D9-36F7-43E2-AB2F-B90AF26B5E84}">
       <p14:sectionLst xmlns:p14="http://schemas.microsoft.com/office/powerpoint/2010/main">
-        <p14:section name="Opening" id="{7087bc6c-fcd6-f765-0880-676ec7d6d976}">
+        <p14:section name="Opening" id="{78235cd4-c041-b54c-967c-4bb0f1ef0e3d}">
           <p14:sldIdLst>
             <p14:sldId id="256"/>
           </p14:sldIdLst>
         </p14:section>
-        <p14:section name="Gate" id="{2dcc0b8a-f6e4-dd21-e4be-0f5bf8b007cd}">
+        <p14:section name="Gate" id="{7cb06613-207b-64d4-5650-b04df47084bc}">
           <p14:sldIdLst>
             <p14:sldId id="257"/>
             <p14:sldId id="258"/>
           </p14:sldIdLst>
         </p14:section>
-        <p14:section name="Pre-teach" id="{a313c641-1dd7-a009-73e5-fd2ae5526abd}">
+        <p14:section name="Pre-teach" id="{9958e3d5-2cfe-8b18-66e4-9fd123318266}">
           <p14:sldIdLst>
             <p14:sldId id="259"/>
             <p14:sldId id="260"/>
           </p14:sldIdLst>
         </p14:section>
-        <p14:section name="Read-along" id="{5c194b42-f5a6-a6df-152a-b3cd96b8c514}">
+        <p14:section name="Read-along" id="{ed8a1bf8-d0b1-07b3-ce3c-8940ac938ae4}">
           <p14:sldIdLst>
             <p14:sldId id="261"/>
             <p14:sldId id="262"/>
           </p14:sldIdLst>
         </p14:section>
-        <p14:section name="Teach" id="{fec41fbb-f1ff-e555-7064-2caf8c1ed595}">
+        <p14:section name="Teach" id="{d3509ea7-9261-1b3c-cee1-abeac5745dda}">
           <p14:sldIdLst>
             <p14:sldId id="263"/>
             <p14:sldId id="264"/>
@@ -158,7 +158,7 @@
             <p14:sldId id="267"/>
           </p14:sldIdLst>
         </p14:section>
-        <p14:section name="Routes" id="{8f86ce66-17c4-53fa-d52f-29c79ca2a6c0}">
+        <p14:section name="Routes" id="{062c9f0b-727e-81b6-1095-827fad67050a}">
           <p14:sldIdLst>
             <p14:sldId id="268"/>
             <p14:sldId id="269"/>
@@ -166,12 +166,12 @@
             <p14:sldId id="271"/>
           </p14:sldIdLst>
         </p14:section>
-        <p14:section name="Close" id="{0690c048-a7f4-1568-e734-89929b605ff8}">
+        <p14:section name="Close" id="{1b0d7426-a22a-3ff2-7662-e61b75620a22}">
           <p14:sldIdLst>
             <p14:sldId id="272"/>
           </p14:sldIdLst>
         </p14:section>
-        <p14:section name="Answers" id="{bccce19a-9a2c-810f-d966-1767f4f34f28}">
+        <p14:section name="Answers" id="{26dd1569-4f0c-b626-2d17-d751d5a74869}">
           <p14:sldIdLst>
             <p14:sldId id="273"/>
             <p14:sldId id="274"/>
@@ -2257,7 +2257,7 @@
             <a:r>
               <a:rPr lang="en-US" dirty="0"/>
               <a:t>Teach — Measuring development. Say it in your own words, then check understanding with a quick question: ask a pupil from the pre-teach group first, since they met these words and ideas before the lesson. Pupils try to recall before you re-explain.
-Development is a measure of how rich or poor a country is. As a country develops, the standard of living and quality of life of its people improve. Geographers measure development with indicators. Gross Domestic Product (GDP) is how much money a country makes, which shows how much people earn. Life expectancy is how long people live. Infant mortality is how many children die young. Calorie consumption is how much people get to eat. The adult literacy rate is how many people can read and write. The number of doctors per 1000 people shows how good medical care is. Standard of living sums up people's overall wellbeing. Your lesson suggested others too, such as safety and the right to vote.
+Development is a measure of how rich or poor a country is. As a country develops, the standard of living and quality of life of its people improve. Geographers measure development with indicators. Gross Domestic Product (GDP) totals the money a country makes in a year, so it tells you roughly what people there earn. Life expectancy is the average age people reach. Infant mortality counts the babies and small children who die. Calorie consumption shows whether people have enough to eat. The adult literacy rate is the share of grown-ups who can read and write. Counting the doctors for every 1000 people shows how good medical care is. Standard of living sums up people's overall wellbeing. Your lesson suggested others too, such as safety and the right to vote.
 Using these measures, countries are sorted into groups. HIC means high income country: the rich countries, such as the United Kingdom, Germany, the USA, Japan, Canada, Australia and New Zealand. LIC means low income country: the poorest countries, such as Somalia, Ethiopia, Angola and the Democratic Republic of Congo. The older names were MEDC (more economically developed country) for an HIC and LEDC (less economically developed country) for an LIC; you may still see them.
 Some countries are neither. NEE means newly emerging economy: a country whose industry and wealth are growing fast, such as Nigeria, South Africa, Brazil, India, Mexico and China. Many African countries are LICs, but Nigeria and South Africa are NEEs, and this is one reason you should never treat Africa as one place.
 Worked example — model it step by step, thinking aloud: Sort these three countries into HIC, LIC and NEE: Japan, Ethiopia, Brazil. (1) Ask of each country: is it rich, poor, or getting richer fast? (2) Japan is one of the world's richest countries: HIC. (3) Ethiopia is one of the poorest: LIC. (4) Brazil has fast-growing industry and cities but also many poor people: NEE. Answer: Japan: HIC. Ethiopia: LIC. Brazil: NEE..
@@ -2350,7 +2350,7 @@
             <a:r>
               <a:rPr lang="en-US" dirty="0"/>
               <a:t>Teach — Measuring development. Say it in your own words, then check understanding with a quick question: ask a pupil from the pre-teach group first, since they met these words and ideas before the lesson. Pupils try to recall before you re-explain.
-Development is a measure of how rich or poor a country is. As a country develops, the standard of living and quality of life of its people improve. Geographers measure development with indicators. Gross Domestic Product (GDP) is how much money a country makes, which shows how much people earn. Life expectancy is how long people live. Infant mortality is how many children die young. Calorie consumption is how much people get to eat. The adult literacy rate is how many people can read and write. The number of doctors per 1000 people shows how good medical care is. Standard of living sums up people's overall wellbeing. Your lesson suggested others too, such as safety and the right to vote.
+Development is a measure of how rich or poor a country is. As a country develops, the standard of living and quality of life of its people improve. Geographers measure development with indicators. Gross Domestic Product (GDP) totals the money a country makes in a year, so it tells you roughly what people there earn. Life expectancy is the average age people reach. Infant mortality counts the babies and small children who die. Calorie consumption shows whether people have enough to eat. The adult literacy rate is the share of grown-ups who can read and write. Counting the doctors for every 1000 people shows how good medical care is. Standard of living sums up people's overall wellbeing. Your lesson suggested others too, such as safety and the right to vote.
 Using these measures, countries are sorted into groups. HIC means high income country: the rich countries, such as the United Kingdom, Germany, the USA, Japan, Canada, Australia and New Zealand. LIC means low income country: the poorest countries, such as Somalia, Ethiopia, Angola and the Democratic Republic of Congo. The older names were MEDC (more economically developed country) for an HIC and LEDC (less economically developed country) for an LIC; you may still see them.
 Some countries are neither. NEE means newly emerging economy: a country whose industry and wealth are growing fast, such as Nigeria, South Africa, Brazil, India, Mexico and China. Many African countries are LICs, but Nigeria and South Africa are NEEs, and this is one reason you should never treat Africa as one place.
 Worked example — model it step by step, thinking aloud: Sort these three countries into HIC, LIC and NEE: Japan, Ethiopia, Brazil. (1) Ask of each country: is it rich, poor, or getting richer fast? (2) Japan is one of the world's richest countries: HIC. (3) Ethiopia is one of the poorest: LIC. (4) Brazil has fast-growing industry and cities but also many poor people: NEE. Answer: Japan: HIC. Ethiopia: LIC. Brazil: NEE..
